--- a/assets/pptx/catalog-504.pptx
+++ b/assets/pptx/catalog-504.pptx
@@ -3331,7 +3331,7 @@
                 <a:ea typeface="Ebrima"/>
                 <a:cs typeface="Ebrima"/>
               </a:rPr>
-              <a:t>እዘምራለሁ (4x)</a:t>
+              <a:t>እዘምራለሁ 4x</a:t>
             </a:r>
           </a:p>
           <a:p>
@@ -3367,7 +3367,7 @@
                 <a:ea typeface="Ebrima"/>
                 <a:cs typeface="Ebrima"/>
               </a:rPr>
-              <a:t>እዘምራለሁኝ ለእግዚአብሔር (2)</a:t>
+              <a:t>እዘምራለሁኝ ለእግዚአብሔር 2</a:t>
             </a:r>
           </a:p>
           <a:p>
@@ -3403,7 +3403,7 @@
                 <a:ea typeface="Ebrima"/>
                 <a:cs typeface="Ebrima"/>
               </a:rPr>
-              <a:t>የምስጋናየ ድምፅ በአርያም ይሰማ (2x)</a:t>
+              <a:t>የምስጋናየ ድምፅ በአርያም ይሰማ 2x</a:t>
             </a:r>
           </a:p>
           <a:p>
@@ -3457,7 +3457,7 @@
                 <a:ea typeface="Ebrima"/>
                 <a:cs typeface="Ebrima"/>
               </a:rPr>
-              <a:t>እዘምራለሁ (4x)</a:t>
+              <a:t>እዘምራለሁ 4x</a:t>
             </a:r>
           </a:p>
           <a:p>
@@ -3493,7 +3493,7 @@
                 <a:ea typeface="Ebrima"/>
                 <a:cs typeface="Ebrima"/>
               </a:rPr>
-              <a:t>እሰዋለታለሁ ምስጋናን በፊቱ (2x)</a:t>
+              <a:t>እሰዋለታለሁ ምስጋናን በፊቱ 2x</a:t>
             </a:r>
           </a:p>
           <a:p>
@@ -3529,7 +3529,7 @@
                 <a:ea typeface="Ebrima"/>
                 <a:cs typeface="Ebrima"/>
               </a:rPr>
-              <a:t>እግዚአብሔር አምላኬን አመልከዋለሁ (2x)</a:t>
+              <a:t>እግዚአብሔር አምላኬን አመልከዋለሁ 2x</a:t>
             </a:r>
           </a:p>
           <a:p>
@@ -3583,7 +3583,7 @@
                 <a:ea typeface="Ebrima"/>
                 <a:cs typeface="Ebrima"/>
               </a:rPr>
-              <a:t>እዘምራለሁ (4x)</a:t>
+              <a:t>እዘምራለሁ 4x</a:t>
             </a:r>
           </a:p>
           <a:p>
@@ -3619,7 +3619,7 @@
                 <a:ea typeface="Ebrima"/>
                 <a:cs typeface="Ebrima"/>
               </a:rPr>
-              <a:t>ለእስራኤል ቅዱስ ቅኔን ልቀኝለት (2x)</a:t>
+              <a:t>ለእስራኤል ቅዱስ ቅኔን ልቀኝለት 2x</a:t>
             </a:r>
           </a:p>
           <a:p>
@@ -3655,7 +3655,7 @@
                 <a:ea typeface="Ebrima"/>
                 <a:cs typeface="Ebrima"/>
               </a:rPr>
-              <a:t>ዝማሬ ሲያቀርቡ ለፈጣሪያቸው (2x)</a:t>
+              <a:t>ዝማሬ ሲያቀርቡ ለፈጣሪያቸው 2x</a:t>
             </a:r>
           </a:p>
           <a:p>
@@ -3709,7 +3709,7 @@
                 <a:ea typeface="Ebrima"/>
                 <a:cs typeface="Ebrima"/>
               </a:rPr>
-              <a:t>እዘምራለሁ (4x)</a:t>
+              <a:t>እዘምራለሁ 4x</a:t>
             </a:r>
           </a:p>
         </p:txBody>
